--- a/聽我禱告.pptx
+++ b/聽我禱告.pptx
@@ -113,6 +113,11 @@
       </a:defRPr>
     </a:lvl9pPr>
   </p:defaultTextStyle>
+  <p:extLst>
+    <p:ext uri="{EFAFB233-063F-42B5-8137-9DF3F51BA10A}">
+      <p15:sldGuideLst xmlns:p15="http://schemas.microsoft.com/office/powerpoint/2012/main"/>
+    </p:ext>
+  </p:extLst>
 </p:presentation>
 </file>
 
@@ -154,7 +159,7 @@
           <a:lstStyle/>
           <a:p>
             <a:r>
-              <a:rPr lang="en-US" altLang="zh-TW" smtClean="0"/>
+              <a:rPr lang="en-US" altLang="zh-TW"/>
               <a:t>Click to edit Master title style</a:t>
             </a:r>
             <a:endParaRPr lang="zh-TW" altLang="en-US"/>
@@ -273,7 +278,7 @@
           </a:lstStyle>
           <a:p>
             <a:r>
-              <a:rPr lang="en-US" altLang="zh-TW" smtClean="0"/>
+              <a:rPr lang="en-US" altLang="zh-TW"/>
               <a:t>Click to edit Master subtitle style</a:t>
             </a:r>
             <a:endParaRPr lang="zh-TW" altLang="en-US"/>
@@ -297,7 +302,7 @@
           <a:p>
             <a:fld id="{CC199E94-3030-445B-AD65-337ED5D12E46}" type="datetimeFigureOut">
               <a:rPr lang="vi-VN" smtClean="0"/>
-              <a:t>30/12/2021</a:t>
+              <a:t>20/07/2026</a:t>
             </a:fld>
             <a:endParaRPr lang="vi-VN"/>
           </a:p>
@@ -391,7 +396,7 @@
           <a:lstStyle/>
           <a:p>
             <a:r>
-              <a:rPr lang="en-US" altLang="zh-TW" smtClean="0"/>
+              <a:rPr lang="en-US" altLang="zh-TW"/>
               <a:t>Click to edit Master title style</a:t>
             </a:r>
             <a:endParaRPr lang="zh-TW" altLang="en-US"/>
@@ -415,35 +420,35 @@
           <a:p>
             <a:pPr lvl="0"/>
             <a:r>
-              <a:rPr lang="en-US" altLang="zh-TW" smtClean="0"/>
+              <a:rPr lang="en-US" altLang="zh-TW"/>
               <a:t>Edit Master text styles</a:t>
             </a:r>
           </a:p>
           <a:p>
             <a:pPr lvl="1"/>
             <a:r>
-              <a:rPr lang="en-US" altLang="zh-TW" smtClean="0"/>
+              <a:rPr lang="en-US" altLang="zh-TW"/>
               <a:t>Second level</a:t>
             </a:r>
           </a:p>
           <a:p>
             <a:pPr lvl="2"/>
             <a:r>
-              <a:rPr lang="en-US" altLang="zh-TW" smtClean="0"/>
+              <a:rPr lang="en-US" altLang="zh-TW"/>
               <a:t>Third level</a:t>
             </a:r>
           </a:p>
           <a:p>
             <a:pPr lvl="3"/>
             <a:r>
-              <a:rPr lang="en-US" altLang="zh-TW" smtClean="0"/>
+              <a:rPr lang="en-US" altLang="zh-TW"/>
               <a:t>Fourth level</a:t>
             </a:r>
           </a:p>
           <a:p>
             <a:pPr lvl="4"/>
             <a:r>
-              <a:rPr lang="en-US" altLang="zh-TW" smtClean="0"/>
+              <a:rPr lang="en-US" altLang="zh-TW"/>
               <a:t>Fifth level</a:t>
             </a:r>
             <a:endParaRPr lang="zh-TW" altLang="en-US"/>
@@ -467,7 +472,7 @@
           <a:p>
             <a:fld id="{CC199E94-3030-445B-AD65-337ED5D12E46}" type="datetimeFigureOut">
               <a:rPr lang="vi-VN" smtClean="0"/>
-              <a:t>30/12/2021</a:t>
+              <a:t>20/07/2026</a:t>
             </a:fld>
             <a:endParaRPr lang="vi-VN"/>
           </a:p>
@@ -566,7 +571,7 @@
           <a:lstStyle/>
           <a:p>
             <a:r>
-              <a:rPr lang="en-US" altLang="zh-TW" smtClean="0"/>
+              <a:rPr lang="en-US" altLang="zh-TW"/>
               <a:t>Click to edit Master title style</a:t>
             </a:r>
             <a:endParaRPr lang="zh-TW" altLang="en-US"/>
@@ -595,35 +600,35 @@
           <a:p>
             <a:pPr lvl="0"/>
             <a:r>
-              <a:rPr lang="en-US" altLang="zh-TW" smtClean="0"/>
+              <a:rPr lang="en-US" altLang="zh-TW"/>
               <a:t>Edit Master text styles</a:t>
             </a:r>
           </a:p>
           <a:p>
             <a:pPr lvl="1"/>
             <a:r>
-              <a:rPr lang="en-US" altLang="zh-TW" smtClean="0"/>
+              <a:rPr lang="en-US" altLang="zh-TW"/>
               <a:t>Second level</a:t>
             </a:r>
           </a:p>
           <a:p>
             <a:pPr lvl="2"/>
             <a:r>
-              <a:rPr lang="en-US" altLang="zh-TW" smtClean="0"/>
+              <a:rPr lang="en-US" altLang="zh-TW"/>
               <a:t>Third level</a:t>
             </a:r>
           </a:p>
           <a:p>
             <a:pPr lvl="3"/>
             <a:r>
-              <a:rPr lang="en-US" altLang="zh-TW" smtClean="0"/>
+              <a:rPr lang="en-US" altLang="zh-TW"/>
               <a:t>Fourth level</a:t>
             </a:r>
           </a:p>
           <a:p>
             <a:pPr lvl="4"/>
             <a:r>
-              <a:rPr lang="en-US" altLang="zh-TW" smtClean="0"/>
+              <a:rPr lang="en-US" altLang="zh-TW"/>
               <a:t>Fifth level</a:t>
             </a:r>
             <a:endParaRPr lang="zh-TW" altLang="en-US"/>
@@ -647,7 +652,7 @@
           <a:p>
             <a:fld id="{CC199E94-3030-445B-AD65-337ED5D12E46}" type="datetimeFigureOut">
               <a:rPr lang="vi-VN" smtClean="0"/>
-              <a:t>30/12/2021</a:t>
+              <a:t>20/07/2026</a:t>
             </a:fld>
             <a:endParaRPr lang="vi-VN"/>
           </a:p>
@@ -741,7 +746,7 @@
           <a:lstStyle/>
           <a:p>
             <a:r>
-              <a:rPr lang="en-US" altLang="zh-TW" smtClean="0"/>
+              <a:rPr lang="en-US" altLang="zh-TW"/>
               <a:t>Click to edit Master title style</a:t>
             </a:r>
             <a:endParaRPr lang="zh-TW" altLang="en-US"/>
@@ -765,35 +770,35 @@
           <a:p>
             <a:pPr lvl="0"/>
             <a:r>
-              <a:rPr lang="en-US" altLang="zh-TW" smtClean="0"/>
+              <a:rPr lang="en-US" altLang="zh-TW"/>
               <a:t>Edit Master text styles</a:t>
             </a:r>
           </a:p>
           <a:p>
             <a:pPr lvl="1"/>
             <a:r>
-              <a:rPr lang="en-US" altLang="zh-TW" smtClean="0"/>
+              <a:rPr lang="en-US" altLang="zh-TW"/>
               <a:t>Second level</a:t>
             </a:r>
           </a:p>
           <a:p>
             <a:pPr lvl="2"/>
             <a:r>
-              <a:rPr lang="en-US" altLang="zh-TW" smtClean="0"/>
+              <a:rPr lang="en-US" altLang="zh-TW"/>
               <a:t>Third level</a:t>
             </a:r>
           </a:p>
           <a:p>
             <a:pPr lvl="3"/>
             <a:r>
-              <a:rPr lang="en-US" altLang="zh-TW" smtClean="0"/>
+              <a:rPr lang="en-US" altLang="zh-TW"/>
               <a:t>Fourth level</a:t>
             </a:r>
           </a:p>
           <a:p>
             <a:pPr lvl="4"/>
             <a:r>
-              <a:rPr lang="en-US" altLang="zh-TW" smtClean="0"/>
+              <a:rPr lang="en-US" altLang="zh-TW"/>
               <a:t>Fifth level</a:t>
             </a:r>
             <a:endParaRPr lang="zh-TW" altLang="en-US"/>
@@ -817,7 +822,7 @@
           <a:p>
             <a:fld id="{CC199E94-3030-445B-AD65-337ED5D12E46}" type="datetimeFigureOut">
               <a:rPr lang="vi-VN" smtClean="0"/>
-              <a:t>30/12/2021</a:t>
+              <a:t>20/07/2026</a:t>
             </a:fld>
             <a:endParaRPr lang="vi-VN"/>
           </a:p>
@@ -920,7 +925,7 @@
           </a:lstStyle>
           <a:p>
             <a:r>
-              <a:rPr lang="en-US" altLang="zh-TW" smtClean="0"/>
+              <a:rPr lang="en-US" altLang="zh-TW"/>
               <a:t>Click to edit Master title style</a:t>
             </a:r>
             <a:endParaRPr lang="zh-TW" altLang="en-US"/>
@@ -1040,7 +1045,7 @@
           <a:p>
             <a:pPr lvl="0"/>
             <a:r>
-              <a:rPr lang="en-US" altLang="zh-TW" smtClean="0"/>
+              <a:rPr lang="en-US" altLang="zh-TW"/>
               <a:t>Edit Master text styles</a:t>
             </a:r>
           </a:p>
@@ -1063,7 +1068,7 @@
           <a:p>
             <a:fld id="{CC199E94-3030-445B-AD65-337ED5D12E46}" type="datetimeFigureOut">
               <a:rPr lang="vi-VN" smtClean="0"/>
-              <a:t>30/12/2021</a:t>
+              <a:t>20/07/2026</a:t>
             </a:fld>
             <a:endParaRPr lang="vi-VN"/>
           </a:p>
@@ -1157,7 +1162,7 @@
           <a:lstStyle/>
           <a:p>
             <a:r>
-              <a:rPr lang="en-US" altLang="zh-TW" smtClean="0"/>
+              <a:rPr lang="en-US" altLang="zh-TW"/>
               <a:t>Click to edit Master title style</a:t>
             </a:r>
             <a:endParaRPr lang="zh-TW" altLang="en-US"/>
@@ -1214,35 +1219,35 @@
           <a:p>
             <a:pPr lvl="0"/>
             <a:r>
-              <a:rPr lang="en-US" altLang="zh-TW" smtClean="0"/>
+              <a:rPr lang="en-US" altLang="zh-TW"/>
               <a:t>Edit Master text styles</a:t>
             </a:r>
           </a:p>
           <a:p>
             <a:pPr lvl="1"/>
             <a:r>
-              <a:rPr lang="en-US" altLang="zh-TW" smtClean="0"/>
+              <a:rPr lang="en-US" altLang="zh-TW"/>
               <a:t>Second level</a:t>
             </a:r>
           </a:p>
           <a:p>
             <a:pPr lvl="2"/>
             <a:r>
-              <a:rPr lang="en-US" altLang="zh-TW" smtClean="0"/>
+              <a:rPr lang="en-US" altLang="zh-TW"/>
               <a:t>Third level</a:t>
             </a:r>
           </a:p>
           <a:p>
             <a:pPr lvl="3"/>
             <a:r>
-              <a:rPr lang="en-US" altLang="zh-TW" smtClean="0"/>
+              <a:rPr lang="en-US" altLang="zh-TW"/>
               <a:t>Fourth level</a:t>
             </a:r>
           </a:p>
           <a:p>
             <a:pPr lvl="4"/>
             <a:r>
-              <a:rPr lang="en-US" altLang="zh-TW" smtClean="0"/>
+              <a:rPr lang="en-US" altLang="zh-TW"/>
               <a:t>Fifth level</a:t>
             </a:r>
             <a:endParaRPr lang="zh-TW" altLang="en-US"/>
@@ -1299,35 +1304,35 @@
           <a:p>
             <a:pPr lvl="0"/>
             <a:r>
-              <a:rPr lang="en-US" altLang="zh-TW" smtClean="0"/>
+              <a:rPr lang="en-US" altLang="zh-TW"/>
               <a:t>Edit Master text styles</a:t>
             </a:r>
           </a:p>
           <a:p>
             <a:pPr lvl="1"/>
             <a:r>
-              <a:rPr lang="en-US" altLang="zh-TW" smtClean="0"/>
+              <a:rPr lang="en-US" altLang="zh-TW"/>
               <a:t>Second level</a:t>
             </a:r>
           </a:p>
           <a:p>
             <a:pPr lvl="2"/>
             <a:r>
-              <a:rPr lang="en-US" altLang="zh-TW" smtClean="0"/>
+              <a:rPr lang="en-US" altLang="zh-TW"/>
               <a:t>Third level</a:t>
             </a:r>
           </a:p>
           <a:p>
             <a:pPr lvl="3"/>
             <a:r>
-              <a:rPr lang="en-US" altLang="zh-TW" smtClean="0"/>
+              <a:rPr lang="en-US" altLang="zh-TW"/>
               <a:t>Fourth level</a:t>
             </a:r>
           </a:p>
           <a:p>
             <a:pPr lvl="4"/>
             <a:r>
-              <a:rPr lang="en-US" altLang="zh-TW" smtClean="0"/>
+              <a:rPr lang="en-US" altLang="zh-TW"/>
               <a:t>Fifth level</a:t>
             </a:r>
             <a:endParaRPr lang="zh-TW" altLang="en-US"/>
@@ -1351,7 +1356,7 @@
           <a:p>
             <a:fld id="{CC199E94-3030-445B-AD65-337ED5D12E46}" type="datetimeFigureOut">
               <a:rPr lang="vi-VN" smtClean="0"/>
-              <a:t>30/12/2021</a:t>
+              <a:t>20/07/2026</a:t>
             </a:fld>
             <a:endParaRPr lang="vi-VN"/>
           </a:p>
@@ -1449,7 +1454,7 @@
           </a:lstStyle>
           <a:p>
             <a:r>
-              <a:rPr lang="en-US" altLang="zh-TW" smtClean="0"/>
+              <a:rPr lang="en-US" altLang="zh-TW"/>
               <a:t>Click to edit Master title style</a:t>
             </a:r>
             <a:endParaRPr lang="zh-TW" altLang="en-US"/>
@@ -1515,7 +1520,7 @@
           <a:p>
             <a:pPr lvl="0"/>
             <a:r>
-              <a:rPr lang="en-US" altLang="zh-TW" smtClean="0"/>
+              <a:rPr lang="en-US" altLang="zh-TW"/>
               <a:t>Edit Master text styles</a:t>
             </a:r>
           </a:p>
@@ -1571,35 +1576,35 @@
           <a:p>
             <a:pPr lvl="0"/>
             <a:r>
-              <a:rPr lang="en-US" altLang="zh-TW" smtClean="0"/>
+              <a:rPr lang="en-US" altLang="zh-TW"/>
               <a:t>Edit Master text styles</a:t>
             </a:r>
           </a:p>
           <a:p>
             <a:pPr lvl="1"/>
             <a:r>
-              <a:rPr lang="en-US" altLang="zh-TW" smtClean="0"/>
+              <a:rPr lang="en-US" altLang="zh-TW"/>
               <a:t>Second level</a:t>
             </a:r>
           </a:p>
           <a:p>
             <a:pPr lvl="2"/>
             <a:r>
-              <a:rPr lang="en-US" altLang="zh-TW" smtClean="0"/>
+              <a:rPr lang="en-US" altLang="zh-TW"/>
               <a:t>Third level</a:t>
             </a:r>
           </a:p>
           <a:p>
             <a:pPr lvl="3"/>
             <a:r>
-              <a:rPr lang="en-US" altLang="zh-TW" smtClean="0"/>
+              <a:rPr lang="en-US" altLang="zh-TW"/>
               <a:t>Fourth level</a:t>
             </a:r>
           </a:p>
           <a:p>
             <a:pPr lvl="4"/>
             <a:r>
-              <a:rPr lang="en-US" altLang="zh-TW" smtClean="0"/>
+              <a:rPr lang="en-US" altLang="zh-TW"/>
               <a:t>Fifth level</a:t>
             </a:r>
             <a:endParaRPr lang="zh-TW" altLang="en-US"/>
@@ -1665,7 +1670,7 @@
           <a:p>
             <a:pPr lvl="0"/>
             <a:r>
-              <a:rPr lang="en-US" altLang="zh-TW" smtClean="0"/>
+              <a:rPr lang="en-US" altLang="zh-TW"/>
               <a:t>Edit Master text styles</a:t>
             </a:r>
           </a:p>
@@ -1721,35 +1726,35 @@
           <a:p>
             <a:pPr lvl="0"/>
             <a:r>
-              <a:rPr lang="en-US" altLang="zh-TW" smtClean="0"/>
+              <a:rPr lang="en-US" altLang="zh-TW"/>
               <a:t>Edit Master text styles</a:t>
             </a:r>
           </a:p>
           <a:p>
             <a:pPr lvl="1"/>
             <a:r>
-              <a:rPr lang="en-US" altLang="zh-TW" smtClean="0"/>
+              <a:rPr lang="en-US" altLang="zh-TW"/>
               <a:t>Second level</a:t>
             </a:r>
           </a:p>
           <a:p>
             <a:pPr lvl="2"/>
             <a:r>
-              <a:rPr lang="en-US" altLang="zh-TW" smtClean="0"/>
+              <a:rPr lang="en-US" altLang="zh-TW"/>
               <a:t>Third level</a:t>
             </a:r>
           </a:p>
           <a:p>
             <a:pPr lvl="3"/>
             <a:r>
-              <a:rPr lang="en-US" altLang="zh-TW" smtClean="0"/>
+              <a:rPr lang="en-US" altLang="zh-TW"/>
               <a:t>Fourth level</a:t>
             </a:r>
           </a:p>
           <a:p>
             <a:pPr lvl="4"/>
             <a:r>
-              <a:rPr lang="en-US" altLang="zh-TW" smtClean="0"/>
+              <a:rPr lang="en-US" altLang="zh-TW"/>
               <a:t>Fifth level</a:t>
             </a:r>
             <a:endParaRPr lang="zh-TW" altLang="en-US"/>
@@ -1773,7 +1778,7 @@
           <a:p>
             <a:fld id="{CC199E94-3030-445B-AD65-337ED5D12E46}" type="datetimeFigureOut">
               <a:rPr lang="vi-VN" smtClean="0"/>
-              <a:t>30/12/2021</a:t>
+              <a:t>20/07/2026</a:t>
             </a:fld>
             <a:endParaRPr lang="vi-VN"/>
           </a:p>
@@ -1867,7 +1872,7 @@
           <a:lstStyle/>
           <a:p>
             <a:r>
-              <a:rPr lang="en-US" altLang="zh-TW" smtClean="0"/>
+              <a:rPr lang="en-US" altLang="zh-TW"/>
               <a:t>Click to edit Master title style</a:t>
             </a:r>
             <a:endParaRPr lang="zh-TW" altLang="en-US"/>
@@ -1891,7 +1896,7 @@
           <a:p>
             <a:fld id="{CC199E94-3030-445B-AD65-337ED5D12E46}" type="datetimeFigureOut">
               <a:rPr lang="vi-VN" smtClean="0"/>
-              <a:t>30/12/2021</a:t>
+              <a:t>20/07/2026</a:t>
             </a:fld>
             <a:endParaRPr lang="vi-VN"/>
           </a:p>
@@ -1986,7 +1991,7 @@
           <a:p>
             <a:fld id="{CC199E94-3030-445B-AD65-337ED5D12E46}" type="datetimeFigureOut">
               <a:rPr lang="vi-VN" smtClean="0"/>
-              <a:t>30/12/2021</a:t>
+              <a:t>20/07/2026</a:t>
             </a:fld>
             <a:endParaRPr lang="vi-VN"/>
           </a:p>
@@ -2089,7 +2094,7 @@
           </a:lstStyle>
           <a:p>
             <a:r>
-              <a:rPr lang="en-US" altLang="zh-TW" smtClean="0"/>
+              <a:rPr lang="en-US" altLang="zh-TW"/>
               <a:t>Click to edit Master title style</a:t>
             </a:r>
             <a:endParaRPr lang="zh-TW" altLang="en-US"/>
@@ -2146,35 +2151,35 @@
           <a:p>
             <a:pPr lvl="0"/>
             <a:r>
-              <a:rPr lang="en-US" altLang="zh-TW" smtClean="0"/>
+              <a:rPr lang="en-US" altLang="zh-TW"/>
               <a:t>Edit Master text styles</a:t>
             </a:r>
           </a:p>
           <a:p>
             <a:pPr lvl="1"/>
             <a:r>
-              <a:rPr lang="en-US" altLang="zh-TW" smtClean="0"/>
+              <a:rPr lang="en-US" altLang="zh-TW"/>
               <a:t>Second level</a:t>
             </a:r>
           </a:p>
           <a:p>
             <a:pPr lvl="2"/>
             <a:r>
-              <a:rPr lang="en-US" altLang="zh-TW" smtClean="0"/>
+              <a:rPr lang="en-US" altLang="zh-TW"/>
               <a:t>Third level</a:t>
             </a:r>
           </a:p>
           <a:p>
             <a:pPr lvl="3"/>
             <a:r>
-              <a:rPr lang="en-US" altLang="zh-TW" smtClean="0"/>
+              <a:rPr lang="en-US" altLang="zh-TW"/>
               <a:t>Fourth level</a:t>
             </a:r>
           </a:p>
           <a:p>
             <a:pPr lvl="4"/>
             <a:r>
-              <a:rPr lang="en-US" altLang="zh-TW" smtClean="0"/>
+              <a:rPr lang="en-US" altLang="zh-TW"/>
               <a:t>Fifth level</a:t>
             </a:r>
             <a:endParaRPr lang="zh-TW" altLang="en-US"/>
@@ -2240,7 +2245,7 @@
           <a:p>
             <a:pPr lvl="0"/>
             <a:r>
-              <a:rPr lang="en-US" altLang="zh-TW" smtClean="0"/>
+              <a:rPr lang="en-US" altLang="zh-TW"/>
               <a:t>Edit Master text styles</a:t>
             </a:r>
           </a:p>
@@ -2263,7 +2268,7 @@
           <a:p>
             <a:fld id="{CC199E94-3030-445B-AD65-337ED5D12E46}" type="datetimeFigureOut">
               <a:rPr lang="vi-VN" smtClean="0"/>
-              <a:t>30/12/2021</a:t>
+              <a:t>20/07/2026</a:t>
             </a:fld>
             <a:endParaRPr lang="vi-VN"/>
           </a:p>
@@ -2366,7 +2371,7 @@
           </a:lstStyle>
           <a:p>
             <a:r>
-              <a:rPr lang="en-US" altLang="zh-TW" smtClean="0"/>
+              <a:rPr lang="en-US" altLang="zh-TW"/>
               <a:t>Click to edit Master title style</a:t>
             </a:r>
             <a:endParaRPr lang="zh-TW" altLang="en-US"/>
@@ -2431,7 +2436,7 @@
           </a:lstStyle>
           <a:p>
             <a:r>
-              <a:rPr lang="en-US" altLang="zh-TW" smtClean="0"/>
+              <a:rPr lang="en-US" altLang="zh-TW"/>
               <a:t>Click icon to add picture</a:t>
             </a:r>
             <a:endParaRPr lang="zh-TW" altLang="en-US"/>
@@ -2497,7 +2502,7 @@
           <a:p>
             <a:pPr lvl="0"/>
             <a:r>
-              <a:rPr lang="en-US" altLang="zh-TW" smtClean="0"/>
+              <a:rPr lang="en-US" altLang="zh-TW"/>
               <a:t>Edit Master text styles</a:t>
             </a:r>
           </a:p>
@@ -2520,7 +2525,7 @@
           <a:p>
             <a:fld id="{CC199E94-3030-445B-AD65-337ED5D12E46}" type="datetimeFigureOut">
               <a:rPr lang="vi-VN" smtClean="0"/>
-              <a:t>30/12/2021</a:t>
+              <a:t>20/07/2026</a:t>
             </a:fld>
             <a:endParaRPr lang="vi-VN"/>
           </a:p>
@@ -2634,10 +2639,9 @@
           <a:lstStyle/>
           <a:p>
             <a:r>
-              <a:rPr lang="zh-TW" altLang="en-US" smtClean="0"/>
+              <a:rPr lang="zh-TW" altLang="en-US"/>
               <a:t>按一下以編輯母片標題樣式</a:t>
             </a:r>
-            <a:endParaRPr lang="zh-TW" altLang="en-US"/>
           </a:p>
         </p:txBody>
       </p:sp>
@@ -2668,38 +2672,37 @@
           <a:p>
             <a:pPr lvl="0"/>
             <a:r>
-              <a:rPr lang="zh-TW" altLang="en-US" smtClean="0"/>
+              <a:rPr lang="zh-TW" altLang="en-US"/>
               <a:t>按一下以編輯母片文字樣式</a:t>
             </a:r>
           </a:p>
           <a:p>
             <a:pPr lvl="1"/>
             <a:r>
-              <a:rPr lang="zh-TW" altLang="en-US" smtClean="0"/>
+              <a:rPr lang="zh-TW" altLang="en-US"/>
               <a:t>第二層</a:t>
             </a:r>
           </a:p>
           <a:p>
             <a:pPr lvl="2"/>
             <a:r>
-              <a:rPr lang="zh-TW" altLang="en-US" smtClean="0"/>
+              <a:rPr lang="zh-TW" altLang="en-US"/>
               <a:t>第三層</a:t>
             </a:r>
           </a:p>
           <a:p>
             <a:pPr lvl="3"/>
             <a:r>
-              <a:rPr lang="zh-TW" altLang="en-US" smtClean="0"/>
+              <a:rPr lang="zh-TW" altLang="en-US"/>
               <a:t>第四層</a:t>
             </a:r>
           </a:p>
           <a:p>
             <a:pPr lvl="4"/>
             <a:r>
-              <a:rPr lang="zh-TW" altLang="en-US" smtClean="0"/>
+              <a:rPr lang="zh-TW" altLang="en-US"/>
               <a:t>第五層</a:t>
             </a:r>
-            <a:endParaRPr lang="zh-TW" altLang="en-US"/>
           </a:p>
         </p:txBody>
       </p:sp>
@@ -2738,7 +2741,7 @@
           <a:p>
             <a:fld id="{CC199E94-3030-445B-AD65-337ED5D12E46}" type="datetimeFigureOut">
               <a:rPr lang="vi-VN" smtClean="0"/>
-              <a:t>30/12/2021</a:t>
+              <a:t>20/07/2026</a:t>
             </a:fld>
             <a:endParaRPr lang="vi-VN"/>
           </a:p>
@@ -3136,7 +3139,7 @@
           <a:lstStyle/>
           <a:p>
             <a:r>
-              <a:rPr lang="zh-CN" altLang="en-US" sz="7200" b="1" i="1" dirty="0" smtClean="0">
+              <a:rPr lang="zh-CN" altLang="en-US" sz="7200" b="1" i="1" dirty="0">
                 <a:solidFill>
                   <a:srgbClr val="660033"/>
                 </a:solidFill>
@@ -3150,24 +3153,7 @@
                 <a:latin typeface="微軟正黑體" pitchFamily="34" charset="-120"/>
                 <a:ea typeface="微軟正黑體" pitchFamily="34" charset="-120"/>
               </a:rPr>
-              <a:t>聽</a:t>
-            </a:r>
-            <a:r>
-              <a:rPr lang="zh-CN" altLang="en-US" sz="7200" b="1" i="1" dirty="0">
-                <a:solidFill>
-                  <a:srgbClr val="660033"/>
-                </a:solidFill>
-                <a:effectLst>
-                  <a:outerShdw blurRad="38100" dist="38100" dir="2700000" algn="tl">
-                    <a:srgbClr val="000000">
-                      <a:alpha val="43137"/>
-                    </a:srgbClr>
-                  </a:outerShdw>
-                </a:effectLst>
-                <a:latin typeface="微軟正黑體" pitchFamily="34" charset="-120"/>
-                <a:ea typeface="微軟正黑體" pitchFamily="34" charset="-120"/>
-              </a:rPr>
-              <a:t>我禱告</a:t>
+              <a:t>聽我禱告</a:t>
             </a:r>
             <a:endParaRPr lang="zh-TW" altLang="en-US" sz="7200" b="1" i="1" dirty="0">
               <a:solidFill>
@@ -3249,17 +3235,7 @@
                 <a:latin typeface="微軟正黑體" pitchFamily="34" charset="-120"/>
                 <a:ea typeface="微軟正黑體" pitchFamily="34" charset="-120"/>
               </a:rPr>
-              <a:t>只要奉耶穌的</a:t>
-            </a:r>
-            <a:r>
-              <a:rPr lang="zh-TW" altLang="en-US" sz="6400" b="1" dirty="0">
-                <a:solidFill>
-                  <a:srgbClr val="660033"/>
-                </a:solidFill>
-                <a:latin typeface="微軟正黑體" pitchFamily="34" charset="-120"/>
-                <a:ea typeface="微軟正黑體" pitchFamily="34" charset="-120"/>
-              </a:rPr>
-              <a:t>名</a:t>
+              <a:t>只要奉耶穌的名</a:t>
             </a:r>
             <a:endParaRPr lang="en-US" altLang="zh-TW" sz="6400" b="1" dirty="0">
               <a:solidFill>
@@ -3281,17 +3257,7 @@
                 <a:latin typeface="微軟正黑體" pitchFamily="34" charset="-120"/>
                 <a:ea typeface="微軟正黑體" pitchFamily="34" charset="-120"/>
               </a:rPr>
-              <a:t>祈</a:t>
-            </a:r>
-            <a:r>
-              <a:rPr lang="zh-TW" altLang="en-US" sz="6400" b="1" dirty="0">
-                <a:solidFill>
-                  <a:srgbClr val="660033"/>
-                </a:solidFill>
-                <a:latin typeface="微軟正黑體" pitchFamily="34" charset="-120"/>
-                <a:ea typeface="微軟正黑體" pitchFamily="34" charset="-120"/>
-              </a:rPr>
-              <a:t>求必得答應</a:t>
+              <a:t>祈求必得答應</a:t>
             </a:r>
             <a:endParaRPr lang="en-US" altLang="zh-TW" sz="6400" b="1" dirty="0">
               <a:solidFill>
@@ -3359,36 +3325,16 @@
               <a:buNone/>
             </a:pPr>
             <a:r>
-              <a:rPr lang="zh-TW" altLang="en-US" sz="6400" b="1" dirty="0" smtClean="0">
+              <a:rPr lang="zh-TW" altLang="en-US" sz="6400" b="1" dirty="0">
                 <a:solidFill>
                   <a:srgbClr val="660033"/>
                 </a:solidFill>
                 <a:latin typeface="微軟正黑體" pitchFamily="34" charset="-120"/>
                 <a:ea typeface="微軟正黑體" pitchFamily="34" charset="-120"/>
               </a:rPr>
-              <a:t>我</a:t>
-            </a:r>
-            <a:r>
-              <a:rPr lang="zh-TW" altLang="en-US" sz="6400" b="1" dirty="0">
-                <a:solidFill>
-                  <a:srgbClr val="660033"/>
-                </a:solidFill>
-                <a:latin typeface="微軟正黑體" pitchFamily="34" charset="-120"/>
-                <a:ea typeface="微軟正黑體" pitchFamily="34" charset="-120"/>
-              </a:rPr>
-              <a:t>真想知</a:t>
-            </a:r>
-            <a:r>
-              <a:rPr lang="zh-TW" altLang="en-US" sz="6400" b="1" dirty="0" smtClean="0">
-                <a:solidFill>
-                  <a:srgbClr val="660033"/>
-                </a:solidFill>
-                <a:latin typeface="微軟正黑體" pitchFamily="34" charset="-120"/>
-                <a:ea typeface="微軟正黑體" pitchFamily="34" charset="-120"/>
-              </a:rPr>
-              <a:t>道  </a:t>
-            </a:r>
-            <a:endParaRPr lang="en-US" altLang="zh-TW" sz="6400" b="1" dirty="0" smtClean="0">
+              <a:t>我真想知道  </a:t>
+            </a:r>
+            <a:endParaRPr lang="en-US" altLang="zh-TW" sz="6400" b="1" dirty="0">
               <a:solidFill>
                 <a:srgbClr val="660033"/>
               </a:solidFill>
@@ -3401,34 +3347,14 @@
               <a:buNone/>
             </a:pPr>
             <a:r>
-              <a:rPr lang="zh-TW" altLang="en-US" sz="6400" b="1" dirty="0" smtClean="0">
+              <a:rPr lang="zh-TW" altLang="en-US" sz="6400" b="1" dirty="0">
                 <a:solidFill>
                   <a:srgbClr val="660033"/>
                 </a:solidFill>
                 <a:latin typeface="微軟正黑體" pitchFamily="34" charset="-120"/>
                 <a:ea typeface="微軟正黑體" pitchFamily="34" charset="-120"/>
               </a:rPr>
-              <a:t>如</a:t>
-            </a:r>
-            <a:r>
-              <a:rPr lang="zh-TW" altLang="en-US" sz="6400" b="1" dirty="0">
-                <a:solidFill>
-                  <a:srgbClr val="660033"/>
-                </a:solidFill>
-                <a:latin typeface="微軟正黑體" pitchFamily="34" charset="-120"/>
-                <a:ea typeface="微軟正黑體" pitchFamily="34" charset="-120"/>
-              </a:rPr>
-              <a:t>何去禱</a:t>
-            </a:r>
-            <a:r>
-              <a:rPr lang="zh-TW" altLang="en-US" sz="6400" b="1" dirty="0" smtClean="0">
-                <a:solidFill>
-                  <a:srgbClr val="660033"/>
-                </a:solidFill>
-                <a:latin typeface="微軟正黑體" pitchFamily="34" charset="-120"/>
-                <a:ea typeface="微軟正黑體" pitchFamily="34" charset="-120"/>
-              </a:rPr>
-              <a:t>告</a:t>
+              <a:t>如何去禱告</a:t>
             </a:r>
             <a:endParaRPr lang="en-US" altLang="zh-TW" sz="6400" b="1" dirty="0">
               <a:solidFill>
@@ -3496,36 +3422,16 @@
               <a:buNone/>
             </a:pPr>
             <a:r>
-              <a:rPr lang="zh-TW" altLang="en-US" sz="6400" b="1" dirty="0" smtClean="0">
+              <a:rPr lang="zh-TW" altLang="en-US" sz="6400" b="1" dirty="0">
                 <a:solidFill>
                   <a:srgbClr val="660033"/>
                 </a:solidFill>
                 <a:latin typeface="微軟正黑體" pitchFamily="34" charset="-120"/>
                 <a:ea typeface="微軟正黑體" pitchFamily="34" charset="-120"/>
               </a:rPr>
-              <a:t>天</a:t>
-            </a:r>
-            <a:r>
-              <a:rPr lang="zh-TW" altLang="en-US" sz="6400" b="1" dirty="0">
-                <a:solidFill>
-                  <a:srgbClr val="660033"/>
-                </a:solidFill>
-                <a:latin typeface="微軟正黑體" pitchFamily="34" charset="-120"/>
-                <a:ea typeface="微軟正黑體" pitchFamily="34" charset="-120"/>
-              </a:rPr>
-              <a:t>父上帝在何</a:t>
-            </a:r>
-            <a:r>
-              <a:rPr lang="zh-TW" altLang="en-US" sz="6400" b="1" dirty="0" smtClean="0">
-                <a:solidFill>
-                  <a:srgbClr val="660033"/>
-                </a:solidFill>
-                <a:latin typeface="微軟正黑體" pitchFamily="34" charset="-120"/>
-                <a:ea typeface="微軟正黑體" pitchFamily="34" charset="-120"/>
-              </a:rPr>
-              <a:t>方</a:t>
-            </a:r>
-            <a:endParaRPr lang="en-US" altLang="zh-TW" sz="6400" b="1" dirty="0" smtClean="0">
+              <a:t>天父上帝在何方</a:t>
+            </a:r>
+            <a:endParaRPr lang="en-US" altLang="zh-TW" sz="6400" b="1" dirty="0">
               <a:solidFill>
                 <a:srgbClr val="660033"/>
               </a:solidFill>
@@ -3538,64 +3444,34 @@
               <a:buNone/>
             </a:pPr>
             <a:r>
-              <a:rPr lang="zh-TW" altLang="en-US" sz="6400" b="1" dirty="0" smtClean="0">
+              <a:rPr lang="zh-TW" altLang="en-US" sz="6400" b="1" dirty="0">
                 <a:solidFill>
                   <a:srgbClr val="660033"/>
                 </a:solidFill>
                 <a:latin typeface="微軟正黑體" pitchFamily="34" charset="-120"/>
                 <a:ea typeface="微軟正黑體" pitchFamily="34" charset="-120"/>
               </a:rPr>
-              <a:t>我</a:t>
-            </a:r>
-            <a:r>
-              <a:rPr lang="zh-TW" altLang="en-US" sz="6400" b="1" dirty="0">
+              <a:t>我願意向</a:t>
+            </a:r>
+            <a:r>
+              <a:rPr lang="zh-CN" altLang="en-US" sz="6400" b="1" dirty="0">
                 <a:solidFill>
                   <a:srgbClr val="660033"/>
                 </a:solidFill>
                 <a:latin typeface="微軟正黑體" pitchFamily="34" charset="-120"/>
                 <a:ea typeface="微軟正黑體" pitchFamily="34" charset="-120"/>
               </a:rPr>
-              <a:t>願意</a:t>
-            </a:r>
-            <a:r>
-              <a:rPr lang="zh-TW" altLang="en-US" sz="6400" b="1" dirty="0" smtClean="0">
+              <a:t>祢</a:t>
+            </a:r>
+            <a:r>
+              <a:rPr lang="zh-TW" altLang="en-US" sz="6400" b="1" dirty="0">
                 <a:solidFill>
                   <a:srgbClr val="660033"/>
                 </a:solidFill>
                 <a:latin typeface="微軟正黑體" pitchFamily="34" charset="-120"/>
                 <a:ea typeface="微軟正黑體" pitchFamily="34" charset="-120"/>
               </a:rPr>
-              <a:t>向</a:t>
-            </a:r>
-            <a:r>
-              <a:rPr lang="zh-CN" altLang="en-US" sz="6400" b="1" dirty="0" smtClean="0">
-                <a:solidFill>
-                  <a:srgbClr val="660033"/>
-                </a:solidFill>
-                <a:latin typeface="微軟正黑體" pitchFamily="34" charset="-120"/>
-                <a:ea typeface="微軟正黑體" pitchFamily="34" charset="-120"/>
-              </a:rPr>
-              <a:t>袮</a:t>
-            </a:r>
-            <a:r>
-              <a:rPr lang="zh-TW" altLang="en-US" sz="6400" b="1" dirty="0" smtClean="0">
-                <a:solidFill>
-                  <a:srgbClr val="660033"/>
-                </a:solidFill>
-                <a:latin typeface="微軟正黑體" pitchFamily="34" charset="-120"/>
-                <a:ea typeface="微軟正黑體" pitchFamily="34" charset="-120"/>
-              </a:rPr>
-              <a:t>傾</a:t>
-            </a:r>
-            <a:r>
-              <a:rPr lang="zh-TW" altLang="en-US" sz="6400" b="1" dirty="0">
-                <a:solidFill>
-                  <a:srgbClr val="660033"/>
-                </a:solidFill>
-                <a:latin typeface="微軟正黑體" pitchFamily="34" charset="-120"/>
-                <a:ea typeface="微軟正黑體" pitchFamily="34" charset="-120"/>
-              </a:rPr>
-              <a:t>訴</a:t>
+              <a:t>傾訴</a:t>
             </a:r>
             <a:endParaRPr lang="en-US" altLang="zh-TW" sz="6400" b="1" dirty="0">
               <a:solidFill>
@@ -3670,17 +3546,7 @@
                 <a:latin typeface="微軟正黑體" pitchFamily="34" charset="-120"/>
                 <a:ea typeface="微軟正黑體" pitchFamily="34" charset="-120"/>
               </a:rPr>
-              <a:t>我今閉雙</a:t>
-            </a:r>
-            <a:r>
-              <a:rPr lang="zh-TW" altLang="en-US" sz="6400" b="1" dirty="0">
-                <a:solidFill>
-                  <a:srgbClr val="660033"/>
-                </a:solidFill>
-                <a:latin typeface="微軟正黑體" pitchFamily="34" charset="-120"/>
-                <a:ea typeface="微軟正黑體" pitchFamily="34" charset="-120"/>
-              </a:rPr>
-              <a:t>眼</a:t>
+              <a:t>我今閉雙眼</a:t>
             </a:r>
             <a:endParaRPr lang="en-US" altLang="zh-TW" sz="6400" b="1" dirty="0">
               <a:solidFill>
@@ -3702,57 +3568,27 @@
                 <a:latin typeface="微軟正黑體" pitchFamily="34" charset="-120"/>
                 <a:ea typeface="微軟正黑體" pitchFamily="34" charset="-120"/>
               </a:rPr>
-              <a:t>祈</a:t>
-            </a:r>
-            <a:r>
-              <a:rPr lang="zh-TW" altLang="en-US" sz="6400" b="1" dirty="0">
+              <a:t>祈求神</a:t>
+            </a:r>
+            <a:r>
+              <a:rPr lang="zh-CN" altLang="en-US" sz="6400" b="1" dirty="0">
                 <a:solidFill>
                   <a:srgbClr val="660033"/>
                 </a:solidFill>
                 <a:latin typeface="微軟正黑體" pitchFamily="34" charset="-120"/>
                 <a:ea typeface="微軟正黑體" pitchFamily="34" charset="-120"/>
               </a:rPr>
-              <a:t>求</a:t>
-            </a:r>
-            <a:r>
-              <a:rPr lang="zh-TW" altLang="en-US" sz="6400" b="1" dirty="0" smtClean="0">
+              <a:t>祢</a:t>
+            </a:r>
+            <a:r>
+              <a:rPr lang="zh-TW" altLang="en-US" sz="6400" b="1" dirty="0">
                 <a:solidFill>
                   <a:srgbClr val="660033"/>
                 </a:solidFill>
                 <a:latin typeface="微軟正黑體" pitchFamily="34" charset="-120"/>
                 <a:ea typeface="微軟正黑體" pitchFamily="34" charset="-120"/>
               </a:rPr>
-              <a:t>神</a:t>
-            </a:r>
-            <a:r>
-              <a:rPr lang="zh-CN" altLang="en-US" sz="6400" b="1" dirty="0">
-                <a:solidFill>
-                  <a:srgbClr val="660033"/>
-                </a:solidFill>
-                <a:latin typeface="微軟正黑體" pitchFamily="34" charset="-120"/>
-                <a:ea typeface="微軟正黑體" pitchFamily="34" charset="-120"/>
-              </a:rPr>
-              <a:t>袮</a:t>
-            </a:r>
-            <a:r>
-              <a:rPr lang="zh-TW" altLang="en-US" sz="6400" b="1" dirty="0" smtClean="0">
-                <a:solidFill>
-                  <a:srgbClr val="660033"/>
-                </a:solidFill>
-                <a:latin typeface="微軟正黑體" pitchFamily="34" charset="-120"/>
-                <a:ea typeface="微軟正黑體" pitchFamily="34" charset="-120"/>
-              </a:rPr>
-              <a:t>聽</a:t>
-            </a:r>
-            <a:r>
-              <a:rPr lang="zh-TW" altLang="en-US" sz="6400" b="1" dirty="0">
-                <a:solidFill>
-                  <a:srgbClr val="660033"/>
-                </a:solidFill>
-                <a:latin typeface="微軟正黑體" pitchFamily="34" charset="-120"/>
-                <a:ea typeface="微軟正黑體" pitchFamily="34" charset="-120"/>
-              </a:rPr>
-              <a:t>見</a:t>
+              <a:t>聽見</a:t>
             </a:r>
             <a:endParaRPr lang="en-US" altLang="zh-TW" sz="6400" b="1" dirty="0">
               <a:solidFill>
@@ -3827,17 +3663,7 @@
                 <a:latin typeface="微軟正黑體" pitchFamily="34" charset="-120"/>
                 <a:ea typeface="微軟正黑體" pitchFamily="34" charset="-120"/>
               </a:rPr>
-              <a:t>心裡面各樣事</a:t>
-            </a:r>
-            <a:r>
-              <a:rPr lang="zh-TW" altLang="en-US" sz="6400" b="1" dirty="0">
-                <a:solidFill>
-                  <a:srgbClr val="660033"/>
-                </a:solidFill>
-                <a:latin typeface="微軟正黑體" pitchFamily="34" charset="-120"/>
-                <a:ea typeface="微軟正黑體" pitchFamily="34" charset="-120"/>
-              </a:rPr>
-              <a:t>情</a:t>
+              <a:t>心裡面各樣事情</a:t>
             </a:r>
             <a:endParaRPr lang="en-US" altLang="zh-TW" sz="6400" b="1" dirty="0">
               <a:solidFill>
@@ -3859,57 +3685,27 @@
                 <a:latin typeface="微軟正黑體" pitchFamily="34" charset="-120"/>
                 <a:ea typeface="微軟正黑體" pitchFamily="34" charset="-120"/>
               </a:rPr>
-              <a:t>我</a:t>
-            </a:r>
-            <a:r>
-              <a:rPr lang="zh-TW" altLang="en-US" sz="6400" b="1" dirty="0">
+              <a:t>我願向</a:t>
+            </a:r>
+            <a:r>
+              <a:rPr lang="zh-CN" altLang="en-US" sz="6400" b="1" dirty="0">
                 <a:solidFill>
                   <a:srgbClr val="660033"/>
                 </a:solidFill>
                 <a:latin typeface="微軟正黑體" pitchFamily="34" charset="-120"/>
                 <a:ea typeface="微軟正黑體" pitchFamily="34" charset="-120"/>
               </a:rPr>
-              <a:t>願</a:t>
-            </a:r>
-            <a:r>
-              <a:rPr lang="zh-TW" altLang="en-US" sz="6400" b="1" dirty="0" smtClean="0">
+              <a:t>祢</a:t>
+            </a:r>
+            <a:r>
+              <a:rPr lang="zh-TW" altLang="en-US" sz="6400" b="1" dirty="0">
                 <a:solidFill>
                   <a:srgbClr val="660033"/>
                 </a:solidFill>
                 <a:latin typeface="微軟正黑體" pitchFamily="34" charset="-120"/>
                 <a:ea typeface="微軟正黑體" pitchFamily="34" charset="-120"/>
               </a:rPr>
-              <a:t>向</a:t>
-            </a:r>
-            <a:r>
-              <a:rPr lang="zh-CN" altLang="en-US" sz="6400" b="1" dirty="0">
-                <a:solidFill>
-                  <a:srgbClr val="660033"/>
-                </a:solidFill>
-                <a:latin typeface="微軟正黑體" pitchFamily="34" charset="-120"/>
-                <a:ea typeface="微軟正黑體" pitchFamily="34" charset="-120"/>
-              </a:rPr>
-              <a:t>袮</a:t>
-            </a:r>
-            <a:r>
-              <a:rPr lang="zh-TW" altLang="en-US" sz="6400" b="1" dirty="0" smtClean="0">
-                <a:solidFill>
-                  <a:srgbClr val="660033"/>
-                </a:solidFill>
-                <a:latin typeface="微軟正黑體" pitchFamily="34" charset="-120"/>
-                <a:ea typeface="微軟正黑體" pitchFamily="34" charset="-120"/>
-              </a:rPr>
-              <a:t>一</a:t>
-            </a:r>
-            <a:r>
-              <a:rPr lang="zh-TW" altLang="en-US" sz="6400" b="1" dirty="0">
-                <a:solidFill>
-                  <a:srgbClr val="660033"/>
-                </a:solidFill>
-                <a:latin typeface="微軟正黑體" pitchFamily="34" charset="-120"/>
-                <a:ea typeface="微軟正黑體" pitchFamily="34" charset="-120"/>
-              </a:rPr>
-              <a:t>一細訴</a:t>
+              <a:t>一一細訴</a:t>
             </a:r>
             <a:endParaRPr lang="en-US" altLang="zh-TW" sz="6400" b="1" dirty="0">
               <a:solidFill>
@@ -3984,17 +3780,7 @@
                 <a:latin typeface="微軟正黑體" pitchFamily="34" charset="-120"/>
                 <a:ea typeface="微軟正黑體" pitchFamily="34" charset="-120"/>
               </a:rPr>
-              <a:t>我心已知</a:t>
-            </a:r>
-            <a:r>
-              <a:rPr lang="zh-TW" altLang="en-US" sz="6400" b="1" dirty="0">
-                <a:solidFill>
-                  <a:srgbClr val="660033"/>
-                </a:solidFill>
-                <a:latin typeface="微軟正黑體" pitchFamily="34" charset="-120"/>
-                <a:ea typeface="微軟正黑體" pitchFamily="34" charset="-120"/>
-              </a:rPr>
-              <a:t>道</a:t>
+              <a:t>我心已知道</a:t>
             </a:r>
             <a:endParaRPr lang="en-US" altLang="zh-TW" sz="6400" b="1" dirty="0">
               <a:solidFill>
@@ -4016,17 +3802,7 @@
                 <a:latin typeface="微軟正黑體" pitchFamily="34" charset="-120"/>
                 <a:ea typeface="微軟正黑體" pitchFamily="34" charset="-120"/>
               </a:rPr>
-              <a:t>神</a:t>
-            </a:r>
-            <a:r>
-              <a:rPr lang="zh-TW" altLang="en-US" sz="6400" b="1" dirty="0">
-                <a:solidFill>
-                  <a:srgbClr val="660033"/>
-                </a:solidFill>
-                <a:latin typeface="微軟正黑體" pitchFamily="34" charset="-120"/>
-                <a:ea typeface="微軟正黑體" pitchFamily="34" charset="-120"/>
-              </a:rPr>
-              <a:t>垂聽禱告</a:t>
+              <a:t>神垂聽禱告</a:t>
             </a:r>
             <a:endParaRPr lang="en-US" altLang="zh-TW" sz="6400" b="1" dirty="0">
               <a:solidFill>
@@ -4101,17 +3877,7 @@
                 <a:latin typeface="微軟正黑體" pitchFamily="34" charset="-120"/>
                 <a:ea typeface="微軟正黑體" pitchFamily="34" charset="-120"/>
               </a:rPr>
-              <a:t>黑夜伴我到晨</a:t>
-            </a:r>
-            <a:r>
-              <a:rPr lang="zh-TW" altLang="en-US" sz="6400" b="1" dirty="0">
-                <a:solidFill>
-                  <a:srgbClr val="660033"/>
-                </a:solidFill>
-                <a:latin typeface="微軟正黑體" pitchFamily="34" charset="-120"/>
-                <a:ea typeface="微軟正黑體" pitchFamily="34" charset="-120"/>
-              </a:rPr>
-              <a:t>早</a:t>
+              <a:t>黑夜伴我到晨早</a:t>
             </a:r>
             <a:endParaRPr lang="en-US" altLang="zh-TW" sz="6400" b="1" dirty="0">
               <a:solidFill>
@@ -4133,17 +3899,7 @@
                 <a:latin typeface="微軟正黑體" pitchFamily="34" charset="-120"/>
                 <a:ea typeface="微軟正黑體" pitchFamily="34" charset="-120"/>
               </a:rPr>
-              <a:t>無</a:t>
-            </a:r>
-            <a:r>
-              <a:rPr lang="zh-TW" altLang="en-US" sz="6400" b="1" dirty="0">
-                <a:solidFill>
-                  <a:srgbClr val="660033"/>
-                </a:solidFill>
-                <a:latin typeface="微軟正黑體" pitchFamily="34" charset="-120"/>
-                <a:ea typeface="微軟正黑體" pitchFamily="34" charset="-120"/>
-              </a:rPr>
-              <a:t>懼怕也無苦惱</a:t>
+              <a:t>無懼怕也無苦惱</a:t>
             </a:r>
             <a:endParaRPr lang="en-US" altLang="zh-TW" sz="6400" b="1" dirty="0">
               <a:solidFill>
@@ -4218,17 +3974,7 @@
                 <a:latin typeface="微軟正黑體" pitchFamily="34" charset="-120"/>
                 <a:ea typeface="微軟正黑體" pitchFamily="34" charset="-120"/>
               </a:rPr>
-              <a:t>我心滿歡</a:t>
-            </a:r>
-            <a:r>
-              <a:rPr lang="zh-TW" altLang="en-US" sz="6400" b="1" dirty="0">
-                <a:solidFill>
-                  <a:srgbClr val="660033"/>
-                </a:solidFill>
-                <a:latin typeface="微軟正黑體" pitchFamily="34" charset="-120"/>
-                <a:ea typeface="微軟正黑體" pitchFamily="34" charset="-120"/>
-              </a:rPr>
-              <a:t>喜</a:t>
+              <a:t>我心滿歡喜</a:t>
             </a:r>
             <a:endParaRPr lang="en-US" altLang="zh-TW" sz="6400" b="1" dirty="0">
               <a:solidFill>
@@ -4250,17 +3996,7 @@
                 <a:latin typeface="微軟正黑體" pitchFamily="34" charset="-120"/>
                 <a:ea typeface="微軟正黑體" pitchFamily="34" charset="-120"/>
               </a:rPr>
-              <a:t>神</a:t>
-            </a:r>
-            <a:r>
-              <a:rPr lang="zh-TW" altLang="en-US" sz="6400" b="1" dirty="0">
-                <a:solidFill>
-                  <a:srgbClr val="660033"/>
-                </a:solidFill>
-                <a:latin typeface="微軟正黑體" pitchFamily="34" charset="-120"/>
-                <a:ea typeface="微軟正黑體" pitchFamily="34" charset="-120"/>
-              </a:rPr>
-              <a:t>成為我知己</a:t>
+              <a:t>神成為我知己</a:t>
             </a:r>
             <a:endParaRPr lang="en-US" altLang="zh-TW" sz="6400" b="1" dirty="0">
               <a:solidFill>
@@ -4335,17 +4071,7 @@
                 <a:latin typeface="微軟正黑體" pitchFamily="34" charset="-120"/>
                 <a:ea typeface="微軟正黑體" pitchFamily="34" charset="-120"/>
               </a:rPr>
-              <a:t>今後各樣事</a:t>
-            </a:r>
-            <a:r>
-              <a:rPr lang="zh-TW" altLang="en-US" sz="6400" b="1" dirty="0">
-                <a:solidFill>
-                  <a:srgbClr val="660033"/>
-                </a:solidFill>
-                <a:latin typeface="微軟正黑體" pitchFamily="34" charset="-120"/>
-                <a:ea typeface="微軟正黑體" pitchFamily="34" charset="-120"/>
-              </a:rPr>
-              <a:t>情</a:t>
+              <a:t>今後各樣事情</a:t>
             </a:r>
             <a:endParaRPr lang="en-US" altLang="zh-TW" sz="6400" b="1" dirty="0">
               <a:solidFill>
@@ -4367,47 +4093,27 @@
                 <a:latin typeface="微軟正黑體" pitchFamily="34" charset="-120"/>
                 <a:ea typeface="微軟正黑體" pitchFamily="34" charset="-120"/>
               </a:rPr>
-              <a:t>靠</a:t>
-            </a:r>
-            <a:r>
-              <a:rPr lang="zh-TW" altLang="en-US" sz="6400" b="1" dirty="0" smtClean="0">
+              <a:t>靠著</a:t>
+            </a:r>
+            <a:r>
+              <a:rPr lang="zh-CN" altLang="en-US" sz="6400" b="1" dirty="0">
                 <a:solidFill>
                   <a:srgbClr val="660033"/>
                 </a:solidFill>
                 <a:latin typeface="微軟正黑體" pitchFamily="34" charset="-120"/>
                 <a:ea typeface="微軟正黑體" pitchFamily="34" charset="-120"/>
               </a:rPr>
-              <a:t>著</a:t>
-            </a:r>
-            <a:r>
-              <a:rPr lang="zh-CN" altLang="en-US" sz="6400" b="1" dirty="0">
+              <a:t>祢</a:t>
+            </a:r>
+            <a:r>
+              <a:rPr lang="zh-TW" altLang="en-US" sz="6400" b="1" dirty="0">
                 <a:solidFill>
                   <a:srgbClr val="660033"/>
                 </a:solidFill>
                 <a:latin typeface="微軟正黑體" pitchFamily="34" charset="-120"/>
                 <a:ea typeface="微軟正黑體" pitchFamily="34" charset="-120"/>
               </a:rPr>
-              <a:t>袮</a:t>
-            </a:r>
-            <a:r>
-              <a:rPr lang="zh-TW" altLang="en-US" sz="6400" b="1" dirty="0" smtClean="0">
-                <a:solidFill>
-                  <a:srgbClr val="660033"/>
-                </a:solidFill>
-                <a:latin typeface="微軟正黑體" pitchFamily="34" charset="-120"/>
-                <a:ea typeface="微軟正黑體" pitchFamily="34" charset="-120"/>
-              </a:rPr>
-              <a:t>我</a:t>
-            </a:r>
-            <a:r>
-              <a:rPr lang="zh-TW" altLang="en-US" sz="6400" b="1" dirty="0">
-                <a:solidFill>
-                  <a:srgbClr val="660033"/>
-                </a:solidFill>
-                <a:latin typeface="微軟正黑體" pitchFamily="34" charset="-120"/>
-                <a:ea typeface="微軟正黑體" pitchFamily="34" charset="-120"/>
-              </a:rPr>
-              <a:t>一一戰勝</a:t>
+              <a:t>我一一戰勝</a:t>
             </a:r>
             <a:endParaRPr lang="en-US" altLang="zh-TW" sz="6400" b="1" dirty="0">
               <a:solidFill>
